--- a/dist/초2/수학/수와계산/초2_수학_수와계산_04_받아내림이있는두자리수뺄셈.pptx
+++ b/dist/초2/수학/수와계산/초2_수학_수와계산_04_받아내림이있는두자리수뺄셈.pptx
@@ -120,13 +120,13 @@
   <p:extLst>
     <p:ext uri="{521415D9-36F7-43E2-AB2F-B90AF26B5E84}">
       <p14:sectionLst xmlns:p14="http://schemas.microsoft.com/office/powerpoint/2010/main">
-        <p14:section name="도입" id="{6fa301a2-ae0e-e6bd-d742-17df16cb8e5a}">
+        <p14:section name="도입" id="{1d578412-fc65-5f53-c00c-ce4c71d2a686}">
           <p14:sldIdLst>
             <p14:sldId id="256"/>
             <p14:sldId id="257"/>
           </p14:sldIdLst>
         </p14:section>
-        <p14:section name="개념" id="{043c229a-6304-fcb3-71e8-6eebaa87e418}">
+        <p14:section name="개념" id="{c2226597-c6ec-3546-9261-562dd9aee4b0}">
           <p14:sldIdLst>
             <p14:sldId id="258"/>
             <p14:sldId id="259"/>
@@ -134,32 +134,32 @@
             <p14:sldId id="263"/>
           </p14:sldIdLst>
         </p14:section>
-        <p14:section name="연습" id="{f6b04c5d-f743-3e21-8ee8-9638f98bc6e9}">
+        <p14:section name="연습" id="{ed5b4152-e98c-9b83-babe-1276286fe171}">
           <p14:sldIdLst>
             <p14:sldId id="261"/>
             <p14:sldId id="262"/>
             <p14:sldId id="264"/>
           </p14:sldIdLst>
         </p14:section>
-        <p14:section name="개념" id="{5145a643-34ff-ebee-6cf8-6d79151bbf82}">
+        <p14:section name="개념" id="{203479ca-fe4a-dcff-139a-f8f5b8eb8ee5}">
           <p14:sldIdLst/>
         </p14:section>
-        <p14:section name="연습" id="{522a7694-8085-e57f-ab07-a2410ee90e9a}">
+        <p14:section name="연습" id="{56ca9e89-4efb-472b-082f-c8d4b89048b1}">
           <p14:sldIdLst/>
         </p14:section>
-        <p14:section name="확인" id="{a1b25b49-8997-332e-bf02-e25a1698942c}">
+        <p14:section name="확인" id="{cfb4bd4e-9656-499f-67bf-35a7b5802d10}">
           <p14:sldIdLst>
             <p14:sldId id="265"/>
             <p14:sldId id="266"/>
             <p14:sldId id="267"/>
           </p14:sldIdLst>
         </p14:section>
-        <p14:section name="정리" id="{0fb3578c-5067-a68a-d8b7-d3e40867cb4b}">
+        <p14:section name="정리" id="{bf821577-9c99-5263-67e9-07bdca25d1b1}">
           <p14:sldIdLst>
             <p14:sldId id="268"/>
           </p14:sldIdLst>
         </p14:section>
-        <p14:section name="보충" id="{7bb5d604-4dc6-9c25-7e4c-7208b1b8685c}">
+        <p14:section name="보충" id="{ad3361f5-9493-1e2a-0683-32d48b7db815}">
           <p14:sldIdLst>
             <p14:sldId id="269"/>
           </p14:sldIdLst>
@@ -3035,7 +3035,7 @@
           </p:nvPr>
         </p:nvGraphicFramePr>
         <p:xfrm>
-          <a:off x="8001000" y="883920"/>
+          <a:off x="8001000" y="922020"/>
           <a:ext cx="3291840" cy="914400"/>
         </p:xfrm>
         <a:graphic>
@@ -3047,7 +3047,7 @@
                 <a:gridCol w="1097280"/>
                 <a:gridCol w="1097280"/>
               </a:tblGrid>
-              <a:tr h="609600">
+              <a:tr h="590550">
                 <a:tc>
                   <a:txBody>
                     <a:bodyPr/>
@@ -3242,7 +3242,7 @@
                   </a:tcPr>
                 </a:tc>
               </a:tr>
-              <a:tr h="609600">
+              <a:tr h="590550">
                 <a:tc>
                   <a:txBody>
                     <a:bodyPr/>
@@ -3437,7 +3437,7 @@
                   </a:tcPr>
                 </a:tc>
               </a:tr>
-              <a:tr h="609600">
+              <a:tr h="590550">
                 <a:tc>
                   <a:txBody>
                     <a:bodyPr/>
@@ -3643,7 +3643,7 @@
                   </a:tcPr>
                 </a:tc>
               </a:tr>
-              <a:tr h="609600">
+              <a:tr h="590550">
                 <a:tc>
                   <a:txBody>
                     <a:bodyPr/>
@@ -16059,7 +16059,7 @@
           </p:nvPr>
         </p:nvGraphicFramePr>
         <p:xfrm>
-          <a:off x="7956469" y="2042160"/>
+          <a:off x="7956469" y="2089785"/>
           <a:ext cx="3291840" cy="914400"/>
         </p:xfrm>
         <a:graphic>
@@ -16071,7 +16071,7 @@
                 <a:gridCol w="1097280"/>
                 <a:gridCol w="1097280"/>
               </a:tblGrid>
-              <a:tr h="609600">
+              <a:tr h="590550">
                 <a:tc>
                   <a:txBody>
                     <a:bodyPr/>
@@ -16266,7 +16266,7 @@
                   </a:tcPr>
                 </a:tc>
               </a:tr>
-              <a:tr h="609600">
+              <a:tr h="590550">
                 <a:tc>
                   <a:txBody>
                     <a:bodyPr/>
@@ -16461,7 +16461,7 @@
                   </a:tcPr>
                 </a:tc>
               </a:tr>
-              <a:tr h="609600">
+              <a:tr h="590550">
                 <a:tc>
                   <a:txBody>
                     <a:bodyPr/>
@@ -16656,7 +16656,7 @@
                   </a:tcPr>
                 </a:tc>
               </a:tr>
-              <a:tr h="609600">
+              <a:tr h="590550">
                 <a:tc>
                   <a:txBody>
                     <a:bodyPr/>
@@ -16862,7 +16862,7 @@
                   </a:tcPr>
                 </a:tc>
               </a:tr>
-              <a:tr h="609600">
+              <a:tr h="590550">
                 <a:tc>
                   <a:txBody>
                     <a:bodyPr/>
@@ -17634,7 +17634,7 @@
           </p:nvPr>
         </p:nvGraphicFramePr>
         <p:xfrm>
-          <a:off x="7312914" y="2087499"/>
+          <a:off x="7312914" y="2027174"/>
           <a:ext cx="3291840" cy="914400"/>
         </p:xfrm>
         <a:graphic>
@@ -17646,7 +17646,7 @@
                 <a:gridCol w="1097280"/>
                 <a:gridCol w="1097280"/>
               </a:tblGrid>
-              <a:tr h="487680">
+              <a:tr h="511810">
                 <a:tc>
                   <a:txBody>
                     <a:bodyPr/>
@@ -17655,7 +17655,7 @@
                       <a:pPr eaLnBrk="0" algn="ctr" indent="0" marL="0">
                         <a:buNone/>
                       </a:pPr>
-                      <a:endParaRPr lang="en-US" sz="2400" dirty="0">
+                      <a:endParaRPr lang="en-US" sz="2600" dirty="0">
                         <a:latin typeface="맑은 고딕" charset="0"/>
                         <a:ea typeface="맑은 고딕" charset="0"/>
                         <a:cs typeface="맑은 고딕" charset="0"/>
@@ -17713,7 +17713,7 @@
                         <a:buNone/>
                       </a:pPr>
                       <a:r>
-                        <a:rPr lang="en-US" sz="2400" b="1" dirty="0">
+                        <a:rPr lang="en-US" sz="2600" b="1" dirty="0">
                           <a:solidFill>
                             <a:srgbClr val="1F2937"/>
                           </a:solidFill>
@@ -17723,7 +17723,7 @@
                         </a:rPr>
                         <a:t>십</a:t>
                       </a:r>
-                      <a:endParaRPr lang="en-US" sz="2400" dirty="0">
+                      <a:endParaRPr lang="en-US" sz="2600" dirty="0">
                         <a:latin typeface="맑은 고딕" charset="0"/>
                         <a:ea typeface="맑은 고딕" charset="0"/>
                         <a:cs typeface="맑은 고딕" charset="0"/>
@@ -17781,7 +17781,7 @@
                         <a:buNone/>
                       </a:pPr>
                       <a:r>
-                        <a:rPr lang="en-US" sz="2400" b="1" dirty="0">
+                        <a:rPr lang="en-US" sz="2600" b="1" dirty="0">
                           <a:solidFill>
                             <a:srgbClr val="1F2937"/>
                           </a:solidFill>
@@ -17791,7 +17791,7 @@
                         </a:rPr>
                         <a:t>일</a:t>
                       </a:r>
-                      <a:endParaRPr lang="en-US" sz="2400" dirty="0">
+                      <a:endParaRPr lang="en-US" sz="2600" dirty="0">
                         <a:latin typeface="맑은 고딕" charset="0"/>
                         <a:ea typeface="맑은 고딕" charset="0"/>
                         <a:cs typeface="맑은 고딕" charset="0"/>
@@ -17841,7 +17841,7 @@
                   </a:tcPr>
                 </a:tc>
               </a:tr>
-              <a:tr h="487680">
+              <a:tr h="511810">
                 <a:tc>
                   <a:txBody>
                     <a:bodyPr/>
@@ -17850,7 +17850,7 @@
                       <a:pPr eaLnBrk="0" algn="ctr" indent="0" marL="0">
                         <a:buNone/>
                       </a:pPr>
-                      <a:endParaRPr lang="en-US" sz="2400" dirty="0">
+                      <a:endParaRPr lang="en-US" sz="2600" dirty="0">
                         <a:latin typeface="맑은 고딕" charset="0"/>
                         <a:ea typeface="맑은 고딕" charset="0"/>
                         <a:cs typeface="맑은 고딕" charset="0"/>
@@ -17908,7 +17908,7 @@
                         <a:buNone/>
                       </a:pPr>
                       <a:r>
-                        <a:rPr lang="en-US" sz="2400" dirty="0">
+                        <a:rPr lang="en-US" sz="2600" dirty="0">
                           <a:solidFill>
                             <a:srgbClr val="1F2937"/>
                           </a:solidFill>
@@ -17918,7 +17918,7 @@
                         </a:rPr>
                         <a:t>□</a:t>
                       </a:r>
-                      <a:endParaRPr lang="en-US" sz="2400" dirty="0">
+                      <a:endParaRPr lang="en-US" sz="2600" dirty="0">
                         <a:latin typeface="맑은 고딕" charset="0"/>
                         <a:ea typeface="맑은 고딕" charset="0"/>
                         <a:cs typeface="맑은 고딕" charset="0"/>
@@ -17976,7 +17976,7 @@
                         <a:buNone/>
                       </a:pPr>
                       <a:r>
-                        <a:rPr lang="en-US" sz="2400" dirty="0">
+                        <a:rPr lang="en-US" sz="2600" dirty="0">
                           <a:solidFill>
                             <a:srgbClr val="1F2937"/>
                           </a:solidFill>
@@ -17986,7 +17986,7 @@
                         </a:rPr>
                         <a:t>□</a:t>
                       </a:r>
-                      <a:endParaRPr lang="en-US" sz="2400" dirty="0">
+                      <a:endParaRPr lang="en-US" sz="2600" dirty="0">
                         <a:latin typeface="맑은 고딕" charset="0"/>
                         <a:ea typeface="맑은 고딕" charset="0"/>
                         <a:cs typeface="맑은 고딕" charset="0"/>
@@ -18036,7 +18036,7 @@
                   </a:tcPr>
                 </a:tc>
               </a:tr>
-              <a:tr h="487680">
+              <a:tr h="511810">
                 <a:tc>
                   <a:txBody>
                     <a:bodyPr/>
@@ -18045,7 +18045,7 @@
                       <a:pPr eaLnBrk="0" algn="ctr" indent="0" marL="0">
                         <a:buNone/>
                       </a:pPr>
-                      <a:endParaRPr lang="en-US" sz="2400" dirty="0">
+                      <a:endParaRPr lang="en-US" sz="2600" dirty="0">
                         <a:latin typeface="맑은 고딕" charset="0"/>
                         <a:ea typeface="맑은 고딕" charset="0"/>
                         <a:cs typeface="맑은 고딕" charset="0"/>
@@ -18103,7 +18103,7 @@
                         <a:buNone/>
                       </a:pPr>
                       <a:r>
-                        <a:rPr lang="en-US" sz="2400" dirty="0">
+                        <a:rPr lang="en-US" sz="2600" dirty="0">
                           <a:solidFill>
                             <a:srgbClr val="1F2937"/>
                           </a:solidFill>
@@ -18113,7 +18113,7 @@
                         </a:rPr>
                         <a:t>6</a:t>
                       </a:r>
-                      <a:endParaRPr lang="en-US" sz="2400" dirty="0">
+                      <a:endParaRPr lang="en-US" sz="2600" dirty="0">
                         <a:latin typeface="맑은 고딕" charset="0"/>
                         <a:ea typeface="맑은 고딕" charset="0"/>
                         <a:cs typeface="맑은 고딕" charset="0"/>
@@ -18171,7 +18171,7 @@
                         <a:buNone/>
                       </a:pPr>
                       <a:r>
-                        <a:rPr lang="en-US" sz="2400" dirty="0">
+                        <a:rPr lang="en-US" sz="2600" dirty="0">
                           <a:solidFill>
                             <a:srgbClr val="1F2937"/>
                           </a:solidFill>
@@ -18181,7 +18181,7 @@
                         </a:rPr>
                         <a:t>1</a:t>
                       </a:r>
-                      <a:endParaRPr lang="en-US" sz="2400" dirty="0">
+                      <a:endParaRPr lang="en-US" sz="2600" dirty="0">
                         <a:latin typeface="맑은 고딕" charset="0"/>
                         <a:ea typeface="맑은 고딕" charset="0"/>
                         <a:cs typeface="맑은 고딕" charset="0"/>
@@ -18231,7 +18231,7 @@
                   </a:tcPr>
                 </a:tc>
               </a:tr>
-              <a:tr h="487680">
+              <a:tr h="511810">
                 <a:tc>
                   <a:txBody>
                     <a:bodyPr/>
@@ -18241,7 +18241,7 @@
                         <a:buNone/>
                       </a:pPr>
                       <a:r>
-                        <a:rPr lang="en-US" sz="2400" dirty="0">
+                        <a:rPr lang="en-US" sz="2600" dirty="0">
                           <a:solidFill>
                             <a:srgbClr val="1F2937"/>
                           </a:solidFill>
@@ -18251,7 +18251,7 @@
                         </a:rPr>
                         <a:t>−</a:t>
                       </a:r>
-                      <a:endParaRPr lang="en-US" sz="2400" dirty="0">
+                      <a:endParaRPr lang="en-US" sz="2600" dirty="0">
                         <a:latin typeface="맑은 고딕" charset="0"/>
                         <a:ea typeface="맑은 고딕" charset="0"/>
                         <a:cs typeface="맑은 고딕" charset="0"/>
@@ -18309,7 +18309,7 @@
                         <a:buNone/>
                       </a:pPr>
                       <a:r>
-                        <a:rPr lang="en-US" sz="2400" dirty="0">
+                        <a:rPr lang="en-US" sz="2600" dirty="0">
                           <a:solidFill>
                             <a:srgbClr val="1F2937"/>
                           </a:solidFill>
@@ -18319,7 +18319,7 @@
                         </a:rPr>
                         <a:t>2</a:t>
                       </a:r>
-                      <a:endParaRPr lang="en-US" sz="2400" dirty="0">
+                      <a:endParaRPr lang="en-US" sz="2600" dirty="0">
                         <a:latin typeface="맑은 고딕" charset="0"/>
                         <a:ea typeface="맑은 고딕" charset="0"/>
                         <a:cs typeface="맑은 고딕" charset="0"/>
@@ -18377,7 +18377,7 @@
                         <a:buNone/>
                       </a:pPr>
                       <a:r>
-                        <a:rPr lang="en-US" sz="2400" dirty="0">
+                        <a:rPr lang="en-US" sz="2600" dirty="0">
                           <a:solidFill>
                             <a:srgbClr val="1F2937"/>
                           </a:solidFill>
@@ -18387,7 +18387,7 @@
                         </a:rPr>
                         <a:t>5</a:t>
                       </a:r>
-                      <a:endParaRPr lang="en-US" sz="2400" dirty="0">
+                      <a:endParaRPr lang="en-US" sz="2600" dirty="0">
                         <a:latin typeface="맑은 고딕" charset="0"/>
                         <a:ea typeface="맑은 고딕" charset="0"/>
                         <a:cs typeface="맑은 고딕" charset="0"/>
@@ -18437,7 +18437,7 @@
                   </a:tcPr>
                 </a:tc>
               </a:tr>
-              <a:tr h="487680">
+              <a:tr h="511810">
                 <a:tc>
                   <a:txBody>
                     <a:bodyPr/>
@@ -18446,7 +18446,7 @@
                       <a:pPr eaLnBrk="0" algn="ctr" indent="0" marL="0">
                         <a:buNone/>
                       </a:pPr>
-                      <a:endParaRPr lang="en-US" sz="2400" dirty="0">
+                      <a:endParaRPr lang="en-US" sz="2600" dirty="0">
                         <a:latin typeface="맑은 고딕" charset="0"/>
                         <a:ea typeface="맑은 고딕" charset="0"/>
                         <a:cs typeface="맑은 고딕" charset="0"/>
@@ -18504,7 +18504,7 @@
                         <a:buNone/>
                       </a:pPr>
                       <a:r>
-                        <a:rPr lang="en-US" sz="2400" dirty="0">
+                        <a:rPr lang="en-US" sz="2600" dirty="0">
                           <a:solidFill>
                             <a:srgbClr val="1F2937"/>
                           </a:solidFill>
@@ -18514,7 +18514,7 @@
                         </a:rPr>
                         <a:t>□</a:t>
                       </a:r>
-                      <a:endParaRPr lang="en-US" sz="2400" dirty="0">
+                      <a:endParaRPr lang="en-US" sz="2600" dirty="0">
                         <a:latin typeface="맑은 고딕" charset="0"/>
                         <a:ea typeface="맑은 고딕" charset="0"/>
                         <a:cs typeface="맑은 고딕" charset="0"/>
@@ -18572,7 +18572,7 @@
                         <a:buNone/>
                       </a:pPr>
                       <a:r>
-                        <a:rPr lang="en-US" sz="2400" dirty="0">
+                        <a:rPr lang="en-US" sz="2600" dirty="0">
                           <a:solidFill>
                             <a:srgbClr val="1F2937"/>
                           </a:solidFill>
@@ -18582,7 +18582,7 @@
                         </a:rPr>
                         <a:t>□</a:t>
                       </a:r>
-                      <a:endParaRPr lang="en-US" sz="2400" dirty="0">
+                      <a:endParaRPr lang="en-US" sz="2600" dirty="0">
                         <a:latin typeface="맑은 고딕" charset="0"/>
                         <a:ea typeface="맑은 고딕" charset="0"/>
                         <a:cs typeface="맑은 고딕" charset="0"/>
@@ -19628,7 +19628,7 @@
           </p:nvPr>
         </p:nvGraphicFramePr>
         <p:xfrm>
-          <a:off x="7956469" y="2042160"/>
+          <a:off x="7956469" y="2089785"/>
           <a:ext cx="3291840" cy="914400"/>
         </p:xfrm>
         <a:graphic>
@@ -19640,7 +19640,7 @@
                 <a:gridCol w="1097280"/>
                 <a:gridCol w="1097280"/>
               </a:tblGrid>
-              <a:tr h="609600">
+              <a:tr h="590550">
                 <a:tc>
                   <a:txBody>
                     <a:bodyPr/>
@@ -19835,7 +19835,7 @@
                   </a:tcPr>
                 </a:tc>
               </a:tr>
-              <a:tr h="609600">
+              <a:tr h="590550">
                 <a:tc>
                   <a:txBody>
                     <a:bodyPr/>
@@ -20030,7 +20030,7 @@
                   </a:tcPr>
                 </a:tc>
               </a:tr>
-              <a:tr h="609600">
+              <a:tr h="590550">
                 <a:tc>
                   <a:txBody>
                     <a:bodyPr/>
@@ -20225,7 +20225,7 @@
                   </a:tcPr>
                 </a:tc>
               </a:tr>
-              <a:tr h="609600">
+              <a:tr h="590550">
                 <a:tc>
                   <a:txBody>
                     <a:bodyPr/>
@@ -20431,7 +20431,7 @@
                   </a:tcPr>
                 </a:tc>
               </a:tr>
-              <a:tr h="609600">
+              <a:tr h="590550">
                 <a:tc>
                   <a:txBody>
                     <a:bodyPr/>
